--- a/Manual架构-自动Build管线说名.pptx
+++ b/Manual架构-自动Build管线说名.pptx
@@ -9,6 +9,7 @@
     <p:sldId id="257" r:id="rId4"/>
     <p:sldId id="258" r:id="rId5"/>
     <p:sldId id="259" r:id="rId6"/>
+    <p:sldId id="260" r:id="rId7"/>
   </p:sldIdLst>
   <p:sldSz cx="12192000" cy="6858000"/>
   <p:notesSz cx="6858000" cy="9144000"/>
@@ -3341,6 +3342,187 @@
 </p:sld>
 </file>
 
+<file path=ppt/slides/slide5.xml><?xml version="1.0" encoding="utf-8"?>
+<p:sld xmlns:a="http://schemas.openxmlformats.org/drawingml/2006/main" xmlns:r="http://schemas.openxmlformats.org/officeDocument/2006/relationships" xmlns:p="http://schemas.openxmlformats.org/presentationml/2006/main">
+  <p:cSld>
+    <p:spTree>
+      <p:nvGrpSpPr>
+        <p:cNvPr id="1" name=""/>
+        <p:cNvGrpSpPr/>
+        <p:nvPr/>
+      </p:nvGrpSpPr>
+      <p:grpSpPr/>
+      <p:sp>
+        <p:nvSpPr>
+          <p:cNvPr id="2" name="标题 1"/>
+          <p:cNvSpPr>
+            <a:spLocks noGrp="1"/>
+          </p:cNvSpPr>
+          <p:nvPr>
+            <p:ph type="title"/>
+          </p:nvPr>
+        </p:nvSpPr>
+        <p:spPr/>
+        <p:txBody>
+          <a:bodyPr/>
+          <a:p>
+            <a:r>
+              <a:rPr lang="en-US" altLang="zh-CN"/>
+              <a:t>Unity WebGL </a:t>
+            </a:r>
+            <a:r>
+              <a:rPr lang="zh-CN" altLang="en-US"/>
+              <a:t>打包后本地</a:t>
+            </a:r>
+            <a:r>
+              <a:rPr lang="zh-CN" altLang="en-US"/>
+              <a:t>测试</a:t>
+            </a:r>
+            <a:endParaRPr lang="zh-CN" altLang="en-US"/>
+          </a:p>
+        </p:txBody>
+      </p:sp>
+      <p:sp>
+        <p:nvSpPr>
+          <p:cNvPr id="3" name="内容占位符 2"/>
+          <p:cNvSpPr>
+            <a:spLocks noGrp="1"/>
+          </p:cNvSpPr>
+          <p:nvPr>
+            <p:ph idx="1"/>
+          </p:nvPr>
+        </p:nvSpPr>
+        <p:spPr/>
+        <p:txBody>
+          <a:bodyPr/>
+          <a:p>
+            <a:r>
+              <a:rPr lang="zh-CN" altLang="en-US"/>
+              <a:t>在另一个项目做的</a:t>
+            </a:r>
+            <a:r>
+              <a:rPr lang="en-US" altLang="zh-CN"/>
+              <a:t> html </a:t>
+            </a:r>
+            <a:r>
+              <a:rPr lang="zh-CN" altLang="en-US"/>
+              <a:t>服务</a:t>
+            </a:r>
+            <a:endParaRPr lang="en-US" altLang="zh-CN"/>
+          </a:p>
+          <a:p>
+            <a:r>
+              <a:rPr lang="en-US" altLang="zh-CN"/>
+              <a:t>I:\2027export_lol_glb_models\Codex-vscode-IDE</a:t>
+            </a:r>
+            <a:endParaRPr lang="en-US" altLang="zh-CN"/>
+          </a:p>
+          <a:p>
+            <a:r>
+              <a:rPr lang="en-US" altLang="zh-CN">
+                <a:solidFill>
+                  <a:srgbClr val="FF0000"/>
+                </a:solidFill>
+              </a:rPr>
+              <a:t>server.sdir.py</a:t>
+            </a:r>
+            <a:endParaRPr lang="en-US" altLang="zh-CN">
+              <a:solidFill>
+                <a:srgbClr val="FF0000"/>
+              </a:solidFill>
+            </a:endParaRPr>
+          </a:p>
+          <a:p>
+            <a:endParaRPr lang="en-US" altLang="zh-CN"/>
+          </a:p>
+          <a:p>
+            <a:pPr marL="0" indent="0">
+              <a:buNone/>
+            </a:pPr>
+            <a:r>
+              <a:rPr lang="en-US" altLang="zh-CN"/>
+              <a:t>= </a:t>
+            </a:r>
+            <a:r>
+              <a:rPr lang="zh-CN" altLang="en-US"/>
+              <a:t>命令</a:t>
+            </a:r>
+            <a:r>
+              <a:rPr lang="en-US" altLang="zh-CN"/>
+              <a:t> =</a:t>
+            </a:r>
+            <a:endParaRPr lang="zh-CN" altLang="en-US"/>
+          </a:p>
+          <a:p>
+            <a:r>
+              <a:rPr lang="en-US" altLang="zh-CN"/>
+              <a:t>python server.sdir.py</a:t>
+            </a:r>
+            <a:endParaRPr lang="en-US" altLang="zh-CN"/>
+          </a:p>
+          <a:p>
+            <a:r>
+              <a:rPr lang="zh-CN" altLang="en-US"/>
+              <a:t>等待输入</a:t>
+            </a:r>
+            <a:r>
+              <a:rPr lang="en-US" altLang="zh-CN">
+                <a:solidFill>
+                  <a:srgbClr val="FF0000"/>
+                </a:solidFill>
+              </a:rPr>
+              <a:t>&lt;</a:t>
+            </a:r>
+            <a:r>
+              <a:rPr lang="zh-CN" altLang="en-US">
+                <a:solidFill>
+                  <a:srgbClr val="FF0000"/>
+                </a:solidFill>
+              </a:rPr>
+              <a:t>刚才打包的</a:t>
+            </a:r>
+            <a:r>
+              <a:rPr lang="en-US" altLang="zh-CN">
+                <a:solidFill>
+                  <a:srgbClr val="FF0000"/>
+                </a:solidFill>
+              </a:rPr>
+              <a:t> WebGL </a:t>
+            </a:r>
+            <a:r>
+              <a:rPr lang="zh-CN" altLang="en-US">
+                <a:solidFill>
+                  <a:srgbClr val="FF0000"/>
+                </a:solidFill>
+              </a:rPr>
+              <a:t>目录</a:t>
+            </a:r>
+            <a:r>
+              <a:rPr lang="en-US" altLang="zh-CN">
+                <a:solidFill>
+                  <a:srgbClr val="FF0000"/>
+                </a:solidFill>
+              </a:rPr>
+              <a:t>&gt;</a:t>
+            </a:r>
+            <a:endParaRPr lang="en-US" altLang="zh-CN"/>
+          </a:p>
+          <a:p>
+            <a:endParaRPr lang="en-US" altLang="zh-CN"/>
+          </a:p>
+          <a:p>
+            <a:endParaRPr lang="en-US" altLang="zh-CN"/>
+          </a:p>
+        </p:txBody>
+      </p:sp>
+    </p:spTree>
+  </p:cSld>
+  <p:clrMapOvr>
+    <a:masterClrMapping/>
+  </p:clrMapOvr>
+</p:sld>
+</file>
+
 <file path=ppt/theme/theme1.xml><?xml version="1.0" encoding="utf-8"?>
 <a:theme xmlns:a="http://schemas.openxmlformats.org/drawingml/2006/main" name="WPS">
   <a:themeElements>
